--- a/docs/presentation-mid-term/dspro1_rent_prediction_presentation.pptx
+++ b/docs/presentation-mid-term/dspro1_rent_prediction_presentation.pptx
@@ -4,17 +4,23 @@
   <p:sldMasterIdLst>
     <p:sldMasterId id="2147483648" r:id="rId1"/>
   </p:sldMasterIdLst>
+  <p:notesMasterIdLst>
+    <p:notesMasterId r:id="rId15"/>
+  </p:notesMasterIdLst>
   <p:sldIdLst>
     <p:sldId id="256" r:id="rId2"/>
     <p:sldId id="257" r:id="rId3"/>
-    <p:sldId id="258" r:id="rId4"/>
-    <p:sldId id="259" r:id="rId5"/>
-    <p:sldId id="260" r:id="rId6"/>
-    <p:sldId id="261" r:id="rId7"/>
-    <p:sldId id="262" r:id="rId8"/>
-    <p:sldId id="263" r:id="rId9"/>
-    <p:sldId id="264" r:id="rId10"/>
-    <p:sldId id="265" r:id="rId11"/>
+    <p:sldId id="267" r:id="rId4"/>
+    <p:sldId id="271" r:id="rId5"/>
+    <p:sldId id="268" r:id="rId6"/>
+    <p:sldId id="258" r:id="rId7"/>
+    <p:sldId id="259" r:id="rId8"/>
+    <p:sldId id="260" r:id="rId9"/>
+    <p:sldId id="261" r:id="rId10"/>
+    <p:sldId id="262" r:id="rId11"/>
+    <p:sldId id="263" r:id="rId12"/>
+    <p:sldId id="264" r:id="rId13"/>
+    <p:sldId id="265" r:id="rId14"/>
   </p:sldIdLst>
   <p:sldSz cx="9144000" cy="6858000" type="screen4x3"/>
   <p:notesSz cx="6858000" cy="9144000"/>
@@ -132,6 +138,530 @@
 </p:presentation>
 </file>
 
+<file path=ppt/notesMasters/notesMaster1.xml><?xml version="1.0" encoding="utf-8"?>
+<p:notesMaster xmlns:a="http://schemas.openxmlformats.org/drawingml/2006/main" xmlns:r="http://schemas.openxmlformats.org/officeDocument/2006/relationships" xmlns:p="http://schemas.openxmlformats.org/presentationml/2006/main">
+  <p:cSld>
+    <p:bg>
+      <p:bgRef idx="1001">
+        <a:schemeClr val="bg1"/>
+      </p:bgRef>
+    </p:bg>
+    <p:spTree>
+      <p:nvGrpSpPr>
+        <p:cNvPr id="1" name=""/>
+        <p:cNvGrpSpPr/>
+        <p:nvPr/>
+      </p:nvGrpSpPr>
+      <p:grpSpPr>
+        <a:xfrm>
+          <a:off x="0" y="0"/>
+          <a:ext cx="0" cy="0"/>
+          <a:chOff x="0" y="0"/>
+          <a:chExt cx="0" cy="0"/>
+        </a:xfrm>
+      </p:grpSpPr>
+      <p:sp>
+        <p:nvSpPr>
+          <p:cNvPr id="2" name="Kopfzeilenplatzhalter 1"/>
+          <p:cNvSpPr>
+            <a:spLocks noGrp="1"/>
+          </p:cNvSpPr>
+          <p:nvPr>
+            <p:ph type="hdr" sz="quarter"/>
+          </p:nvPr>
+        </p:nvSpPr>
+        <p:spPr>
+          <a:xfrm>
+            <a:off x="0" y="0"/>
+            <a:ext cx="2971800" cy="458788"/>
+          </a:xfrm>
+          <a:prstGeom prst="rect">
+            <a:avLst/>
+          </a:prstGeom>
+        </p:spPr>
+        <p:txBody>
+          <a:bodyPr vert="horz" lIns="91440" tIns="45720" rIns="91440" bIns="45720" rtlCol="0"/>
+          <a:lstStyle>
+            <a:lvl1pPr algn="l">
+              <a:defRPr sz="1200"/>
+            </a:lvl1pPr>
+          </a:lstStyle>
+          <a:p>
+            <a:endParaRPr lang="de-CH"/>
+          </a:p>
+        </p:txBody>
+      </p:sp>
+      <p:sp>
+        <p:nvSpPr>
+          <p:cNvPr id="3" name="Datumsplatzhalter 2"/>
+          <p:cNvSpPr>
+            <a:spLocks noGrp="1"/>
+          </p:cNvSpPr>
+          <p:nvPr>
+            <p:ph type="dt" idx="1"/>
+          </p:nvPr>
+        </p:nvSpPr>
+        <p:spPr>
+          <a:xfrm>
+            <a:off x="3884613" y="0"/>
+            <a:ext cx="2971800" cy="458788"/>
+          </a:xfrm>
+          <a:prstGeom prst="rect">
+            <a:avLst/>
+          </a:prstGeom>
+        </p:spPr>
+        <p:txBody>
+          <a:bodyPr vert="horz" lIns="91440" tIns="45720" rIns="91440" bIns="45720" rtlCol="0"/>
+          <a:lstStyle>
+            <a:lvl1pPr algn="r">
+              <a:defRPr sz="1200"/>
+            </a:lvl1pPr>
+          </a:lstStyle>
+          <a:p>
+            <a:fld id="{31A3DD0C-7D6C-4C8C-8AA9-FEC5D85FD2DF}" type="datetimeFigureOut">
+              <a:rPr lang="de-CH" smtClean="0"/>
+              <a:t>13.03.2026</a:t>
+            </a:fld>
+            <a:endParaRPr lang="de-CH"/>
+          </a:p>
+        </p:txBody>
+      </p:sp>
+      <p:sp>
+        <p:nvSpPr>
+          <p:cNvPr id="4" name="Folienbildplatzhalter 3"/>
+          <p:cNvSpPr>
+            <a:spLocks noGrp="1" noRot="1" noChangeAspect="1"/>
+          </p:cNvSpPr>
+          <p:nvPr>
+            <p:ph type="sldImg" idx="2"/>
+          </p:nvPr>
+        </p:nvSpPr>
+        <p:spPr>
+          <a:xfrm>
+            <a:off x="1371600" y="1143000"/>
+            <a:ext cx="4114800" cy="3086100"/>
+          </a:xfrm>
+          <a:prstGeom prst="rect">
+            <a:avLst/>
+          </a:prstGeom>
+          <a:noFill/>
+          <a:ln w="12700">
+            <a:solidFill>
+              <a:prstClr val="black"/>
+            </a:solidFill>
+          </a:ln>
+        </p:spPr>
+        <p:txBody>
+          <a:bodyPr vert="horz" lIns="91440" tIns="45720" rIns="91440" bIns="45720" rtlCol="0" anchor="ctr"/>
+          <a:lstStyle/>
+          <a:p>
+            <a:endParaRPr lang="de-CH"/>
+          </a:p>
+        </p:txBody>
+      </p:sp>
+      <p:sp>
+        <p:nvSpPr>
+          <p:cNvPr id="5" name="Notizenplatzhalter 4"/>
+          <p:cNvSpPr>
+            <a:spLocks noGrp="1"/>
+          </p:cNvSpPr>
+          <p:nvPr>
+            <p:ph type="body" sz="quarter" idx="3"/>
+          </p:nvPr>
+        </p:nvSpPr>
+        <p:spPr>
+          <a:xfrm>
+            <a:off x="685800" y="4400550"/>
+            <a:ext cx="5486400" cy="3600450"/>
+          </a:xfrm>
+          <a:prstGeom prst="rect">
+            <a:avLst/>
+          </a:prstGeom>
+        </p:spPr>
+        <p:txBody>
+          <a:bodyPr vert="horz" lIns="91440" tIns="45720" rIns="91440" bIns="45720" rtlCol="0"/>
+          <a:lstStyle/>
+          <a:p>
+            <a:pPr lvl="0"/>
+            <a:r>
+              <a:rPr lang="de-DE"/>
+              <a:t>Mastertextformat bearbeiten</a:t>
+            </a:r>
+          </a:p>
+          <a:p>
+            <a:pPr lvl="1"/>
+            <a:r>
+              <a:rPr lang="de-DE"/>
+              <a:t>Zweite Ebene</a:t>
+            </a:r>
+          </a:p>
+          <a:p>
+            <a:pPr lvl="2"/>
+            <a:r>
+              <a:rPr lang="de-DE"/>
+              <a:t>Dritte Ebene</a:t>
+            </a:r>
+          </a:p>
+          <a:p>
+            <a:pPr lvl="3"/>
+            <a:r>
+              <a:rPr lang="de-DE"/>
+              <a:t>Vierte Ebene</a:t>
+            </a:r>
+          </a:p>
+          <a:p>
+            <a:pPr lvl="4"/>
+            <a:r>
+              <a:rPr lang="de-DE"/>
+              <a:t>Fünfte Ebene</a:t>
+            </a:r>
+            <a:endParaRPr lang="de-CH"/>
+          </a:p>
+        </p:txBody>
+      </p:sp>
+      <p:sp>
+        <p:nvSpPr>
+          <p:cNvPr id="6" name="Fußzeilenplatzhalter 5"/>
+          <p:cNvSpPr>
+            <a:spLocks noGrp="1"/>
+          </p:cNvSpPr>
+          <p:nvPr>
+            <p:ph type="ftr" sz="quarter" idx="4"/>
+          </p:nvPr>
+        </p:nvSpPr>
+        <p:spPr>
+          <a:xfrm>
+            <a:off x="0" y="8685213"/>
+            <a:ext cx="2971800" cy="458787"/>
+          </a:xfrm>
+          <a:prstGeom prst="rect">
+            <a:avLst/>
+          </a:prstGeom>
+        </p:spPr>
+        <p:txBody>
+          <a:bodyPr vert="horz" lIns="91440" tIns="45720" rIns="91440" bIns="45720" rtlCol="0" anchor="b"/>
+          <a:lstStyle>
+            <a:lvl1pPr algn="l">
+              <a:defRPr sz="1200"/>
+            </a:lvl1pPr>
+          </a:lstStyle>
+          <a:p>
+            <a:endParaRPr lang="de-CH"/>
+          </a:p>
+        </p:txBody>
+      </p:sp>
+      <p:sp>
+        <p:nvSpPr>
+          <p:cNvPr id="7" name="Foliennummernplatzhalter 6"/>
+          <p:cNvSpPr>
+            <a:spLocks noGrp="1"/>
+          </p:cNvSpPr>
+          <p:nvPr>
+            <p:ph type="sldNum" sz="quarter" idx="5"/>
+          </p:nvPr>
+        </p:nvSpPr>
+        <p:spPr>
+          <a:xfrm>
+            <a:off x="3884613" y="8685213"/>
+            <a:ext cx="2971800" cy="458787"/>
+          </a:xfrm>
+          <a:prstGeom prst="rect">
+            <a:avLst/>
+          </a:prstGeom>
+        </p:spPr>
+        <p:txBody>
+          <a:bodyPr vert="horz" lIns="91440" tIns="45720" rIns="91440" bIns="45720" rtlCol="0" anchor="b"/>
+          <a:lstStyle>
+            <a:lvl1pPr algn="r">
+              <a:defRPr sz="1200"/>
+            </a:lvl1pPr>
+          </a:lstStyle>
+          <a:p>
+            <a:fld id="{A731DA7E-AE92-485A-8887-CD2923936C8D}" type="slidenum">
+              <a:rPr lang="de-CH" smtClean="0"/>
+              <a:t>‹Nr.›</a:t>
+            </a:fld>
+            <a:endParaRPr lang="de-CH"/>
+          </a:p>
+        </p:txBody>
+      </p:sp>
+    </p:spTree>
+    <p:extLst>
+      <p:ext uri="{BB962C8B-B14F-4D97-AF65-F5344CB8AC3E}">
+        <p14:creationId xmlns:p14="http://schemas.microsoft.com/office/powerpoint/2010/main" val="4072687559"/>
+      </p:ext>
+    </p:extLst>
+  </p:cSld>
+  <p:clrMap bg1="lt1" tx1="dk1" bg2="lt2" tx2="dk2" accent1="accent1" accent2="accent2" accent3="accent3" accent4="accent4" accent5="accent5" accent6="accent6" hlink="hlink" folHlink="folHlink"/>
+  <p:notesStyle>
+    <a:lvl1pPr marL="0" algn="l" defTabSz="914400" rtl="0" eaLnBrk="1" latinLnBrk="0" hangingPunct="1">
+      <a:defRPr sz="1200" kern="1200">
+        <a:solidFill>
+          <a:schemeClr val="tx1"/>
+        </a:solidFill>
+        <a:latin typeface="+mn-lt"/>
+        <a:ea typeface="+mn-ea"/>
+        <a:cs typeface="+mn-cs"/>
+      </a:defRPr>
+    </a:lvl1pPr>
+    <a:lvl2pPr marL="457200" algn="l" defTabSz="914400" rtl="0" eaLnBrk="1" latinLnBrk="0" hangingPunct="1">
+      <a:defRPr sz="1200" kern="1200">
+        <a:solidFill>
+          <a:schemeClr val="tx1"/>
+        </a:solidFill>
+        <a:latin typeface="+mn-lt"/>
+        <a:ea typeface="+mn-ea"/>
+        <a:cs typeface="+mn-cs"/>
+      </a:defRPr>
+    </a:lvl2pPr>
+    <a:lvl3pPr marL="914400" algn="l" defTabSz="914400" rtl="0" eaLnBrk="1" latinLnBrk="0" hangingPunct="1">
+      <a:defRPr sz="1200" kern="1200">
+        <a:solidFill>
+          <a:schemeClr val="tx1"/>
+        </a:solidFill>
+        <a:latin typeface="+mn-lt"/>
+        <a:ea typeface="+mn-ea"/>
+        <a:cs typeface="+mn-cs"/>
+      </a:defRPr>
+    </a:lvl3pPr>
+    <a:lvl4pPr marL="1371600" algn="l" defTabSz="914400" rtl="0" eaLnBrk="1" latinLnBrk="0" hangingPunct="1">
+      <a:defRPr sz="1200" kern="1200">
+        <a:solidFill>
+          <a:schemeClr val="tx1"/>
+        </a:solidFill>
+        <a:latin typeface="+mn-lt"/>
+        <a:ea typeface="+mn-ea"/>
+        <a:cs typeface="+mn-cs"/>
+      </a:defRPr>
+    </a:lvl4pPr>
+    <a:lvl5pPr marL="1828800" algn="l" defTabSz="914400" rtl="0" eaLnBrk="1" latinLnBrk="0" hangingPunct="1">
+      <a:defRPr sz="1200" kern="1200">
+        <a:solidFill>
+          <a:schemeClr val="tx1"/>
+        </a:solidFill>
+        <a:latin typeface="+mn-lt"/>
+        <a:ea typeface="+mn-ea"/>
+        <a:cs typeface="+mn-cs"/>
+      </a:defRPr>
+    </a:lvl5pPr>
+    <a:lvl6pPr marL="2286000" algn="l" defTabSz="914400" rtl="0" eaLnBrk="1" latinLnBrk="0" hangingPunct="1">
+      <a:defRPr sz="1200" kern="1200">
+        <a:solidFill>
+          <a:schemeClr val="tx1"/>
+        </a:solidFill>
+        <a:latin typeface="+mn-lt"/>
+        <a:ea typeface="+mn-ea"/>
+        <a:cs typeface="+mn-cs"/>
+      </a:defRPr>
+    </a:lvl6pPr>
+    <a:lvl7pPr marL="2743200" algn="l" defTabSz="914400" rtl="0" eaLnBrk="1" latinLnBrk="0" hangingPunct="1">
+      <a:defRPr sz="1200" kern="1200">
+        <a:solidFill>
+          <a:schemeClr val="tx1"/>
+        </a:solidFill>
+        <a:latin typeface="+mn-lt"/>
+        <a:ea typeface="+mn-ea"/>
+        <a:cs typeface="+mn-cs"/>
+      </a:defRPr>
+    </a:lvl7pPr>
+    <a:lvl8pPr marL="3200400" algn="l" defTabSz="914400" rtl="0" eaLnBrk="1" latinLnBrk="0" hangingPunct="1">
+      <a:defRPr sz="1200" kern="1200">
+        <a:solidFill>
+          <a:schemeClr val="tx1"/>
+        </a:solidFill>
+        <a:latin typeface="+mn-lt"/>
+        <a:ea typeface="+mn-ea"/>
+        <a:cs typeface="+mn-cs"/>
+      </a:defRPr>
+    </a:lvl8pPr>
+    <a:lvl9pPr marL="3657600" algn="l" defTabSz="914400" rtl="0" eaLnBrk="1" latinLnBrk="0" hangingPunct="1">
+      <a:defRPr sz="1200" kern="1200">
+        <a:solidFill>
+          <a:schemeClr val="tx1"/>
+        </a:solidFill>
+        <a:latin typeface="+mn-lt"/>
+        <a:ea typeface="+mn-ea"/>
+        <a:cs typeface="+mn-cs"/>
+      </a:defRPr>
+    </a:lvl9pPr>
+  </p:notesStyle>
+</p:notesMaster>
+</file>
+
+<file path=ppt/notesSlides/notesSlide1.xml><?xml version="1.0" encoding="utf-8"?>
+<p:notes xmlns:a="http://schemas.openxmlformats.org/drawingml/2006/main" xmlns:r="http://schemas.openxmlformats.org/officeDocument/2006/relationships" xmlns:p="http://schemas.openxmlformats.org/presentationml/2006/main">
+  <p:cSld>
+    <p:spTree>
+      <p:nvGrpSpPr>
+        <p:cNvPr id="1" name=""/>
+        <p:cNvGrpSpPr/>
+        <p:nvPr/>
+      </p:nvGrpSpPr>
+      <p:grpSpPr>
+        <a:xfrm>
+          <a:off x="0" y="0"/>
+          <a:ext cx="0" cy="0"/>
+          <a:chOff x="0" y="0"/>
+          <a:chExt cx="0" cy="0"/>
+        </a:xfrm>
+      </p:grpSpPr>
+      <p:sp>
+        <p:nvSpPr>
+          <p:cNvPr id="2" name="Folienbildplatzhalter 1"/>
+          <p:cNvSpPr>
+            <a:spLocks noGrp="1" noRot="1" noChangeAspect="1"/>
+          </p:cNvSpPr>
+          <p:nvPr>
+            <p:ph type="sldImg"/>
+          </p:nvPr>
+        </p:nvSpPr>
+        <p:spPr/>
+      </p:sp>
+      <p:sp>
+        <p:nvSpPr>
+          <p:cNvPr id="3" name="Notizenplatzhalter 2"/>
+          <p:cNvSpPr>
+            <a:spLocks noGrp="1"/>
+          </p:cNvSpPr>
+          <p:nvPr>
+            <p:ph type="body" idx="1"/>
+          </p:nvPr>
+        </p:nvSpPr>
+        <p:spPr/>
+        <p:txBody>
+          <a:bodyPr/>
+          <a:lstStyle/>
+          <a:p>
+            <a:endParaRPr lang="de-CH" dirty="0"/>
+          </a:p>
+        </p:txBody>
+      </p:sp>
+      <p:sp>
+        <p:nvSpPr>
+          <p:cNvPr id="4" name="Foliennummernplatzhalter 3"/>
+          <p:cNvSpPr>
+            <a:spLocks noGrp="1"/>
+          </p:cNvSpPr>
+          <p:nvPr>
+            <p:ph type="sldNum" sz="quarter" idx="5"/>
+          </p:nvPr>
+        </p:nvSpPr>
+        <p:spPr/>
+        <p:txBody>
+          <a:bodyPr/>
+          <a:lstStyle/>
+          <a:p>
+            <a:fld id="{A731DA7E-AE92-485A-8887-CD2923936C8D}" type="slidenum">
+              <a:rPr lang="de-CH" smtClean="0"/>
+              <a:t>2</a:t>
+            </a:fld>
+            <a:endParaRPr lang="de-CH"/>
+          </a:p>
+        </p:txBody>
+      </p:sp>
+    </p:spTree>
+    <p:extLst>
+      <p:ext uri="{BB962C8B-B14F-4D97-AF65-F5344CB8AC3E}">
+        <p14:creationId xmlns:p14="http://schemas.microsoft.com/office/powerpoint/2010/main" val="3111900069"/>
+      </p:ext>
+    </p:extLst>
+  </p:cSld>
+  <p:clrMapOvr>
+    <a:masterClrMapping/>
+  </p:clrMapOvr>
+</p:notes>
+</file>
+
+<file path=ppt/notesSlides/notesSlide2.xml><?xml version="1.0" encoding="utf-8"?>
+<p:notes xmlns:a="http://schemas.openxmlformats.org/drawingml/2006/main" xmlns:r="http://schemas.openxmlformats.org/officeDocument/2006/relationships" xmlns:p="http://schemas.openxmlformats.org/presentationml/2006/main">
+  <p:cSld>
+    <p:spTree>
+      <p:nvGrpSpPr>
+        <p:cNvPr id="1" name=""/>
+        <p:cNvGrpSpPr/>
+        <p:nvPr/>
+      </p:nvGrpSpPr>
+      <p:grpSpPr>
+        <a:xfrm>
+          <a:off x="0" y="0"/>
+          <a:ext cx="0" cy="0"/>
+          <a:chOff x="0" y="0"/>
+          <a:chExt cx="0" cy="0"/>
+        </a:xfrm>
+      </p:grpSpPr>
+      <p:sp>
+        <p:nvSpPr>
+          <p:cNvPr id="2" name="Folienbildplatzhalter 1"/>
+          <p:cNvSpPr>
+            <a:spLocks noGrp="1" noRot="1" noChangeAspect="1"/>
+          </p:cNvSpPr>
+          <p:nvPr>
+            <p:ph type="sldImg"/>
+          </p:nvPr>
+        </p:nvSpPr>
+        <p:spPr/>
+      </p:sp>
+      <p:sp>
+        <p:nvSpPr>
+          <p:cNvPr id="3" name="Notizenplatzhalter 2"/>
+          <p:cNvSpPr>
+            <a:spLocks noGrp="1"/>
+          </p:cNvSpPr>
+          <p:nvPr>
+            <p:ph type="body" idx="1"/>
+          </p:nvPr>
+        </p:nvSpPr>
+        <p:spPr/>
+        <p:txBody>
+          <a:bodyPr/>
+          <a:lstStyle/>
+          <a:p>
+            <a:r>
+              <a:rPr lang="de-CH" dirty="0">
+                <a:hlinkClick r:id="rId3"/>
+              </a:rPr>
+              <a:t>Backlog · KANBAN</a:t>
+            </a:r>
+            <a:endParaRPr lang="de-CH" dirty="0"/>
+          </a:p>
+        </p:txBody>
+      </p:sp>
+      <p:sp>
+        <p:nvSpPr>
+          <p:cNvPr id="4" name="Foliennummernplatzhalter 3"/>
+          <p:cNvSpPr>
+            <a:spLocks noGrp="1"/>
+          </p:cNvSpPr>
+          <p:nvPr>
+            <p:ph type="sldNum" sz="quarter" idx="5"/>
+          </p:nvPr>
+        </p:nvSpPr>
+        <p:spPr/>
+        <p:txBody>
+          <a:bodyPr/>
+          <a:lstStyle/>
+          <a:p>
+            <a:fld id="{A731DA7E-AE92-485A-8887-CD2923936C8D}" type="slidenum">
+              <a:rPr lang="de-CH" smtClean="0"/>
+              <a:t>3</a:t>
+            </a:fld>
+            <a:endParaRPr lang="de-CH"/>
+          </a:p>
+        </p:txBody>
+      </p:sp>
+    </p:spTree>
+    <p:extLst>
+      <p:ext uri="{BB962C8B-B14F-4D97-AF65-F5344CB8AC3E}">
+        <p14:creationId xmlns:p14="http://schemas.microsoft.com/office/powerpoint/2010/main" val="782758917"/>
+      </p:ext>
+    </p:extLst>
+  </p:cSld>
+  <p:clrMapOvr>
+    <a:masterClrMapping/>
+  </p:clrMapOvr>
+</p:notes>
+</file>
+
 <file path=ppt/slideLayouts/slideLayout1.xml><?xml version="1.0" encoding="utf-8"?>
 <p:sldLayout xmlns:a="http://schemas.openxmlformats.org/drawingml/2006/main" xmlns:r="http://schemas.openxmlformats.org/officeDocument/2006/relationships" xmlns:p="http://schemas.openxmlformats.org/presentationml/2006/main" type="title" preserve="1">
   <p:cSld name="Title Slide">
@@ -311,7 +841,7 @@
           <a:p>
             <a:fld id="{5BCAD085-E8A6-8845-BD4E-CB4CCA059FC4}" type="datetimeFigureOut">
               <a:rPr lang="en-US" smtClean="0"/>
-              <a:t>3/10/2026</a:t>
+              <a:t>3/13/2026</a:t>
             </a:fld>
             <a:endParaRPr lang="en-US"/>
           </a:p>
@@ -479,7 +1009,7 @@
           <a:p>
             <a:fld id="{5BCAD085-E8A6-8845-BD4E-CB4CCA059FC4}" type="datetimeFigureOut">
               <a:rPr lang="en-US" smtClean="0"/>
-              <a:t>3/10/2026</a:t>
+              <a:t>3/13/2026</a:t>
             </a:fld>
             <a:endParaRPr lang="en-US"/>
           </a:p>
@@ -657,7 +1187,7 @@
           <a:p>
             <a:fld id="{5BCAD085-E8A6-8845-BD4E-CB4CCA059FC4}" type="datetimeFigureOut">
               <a:rPr lang="en-US" smtClean="0"/>
-              <a:t>3/10/2026</a:t>
+              <a:t>3/13/2026</a:t>
             </a:fld>
             <a:endParaRPr lang="en-US"/>
           </a:p>
@@ -825,7 +1355,7 @@
           <a:p>
             <a:fld id="{5BCAD085-E8A6-8845-BD4E-CB4CCA059FC4}" type="datetimeFigureOut">
               <a:rPr lang="en-US" smtClean="0"/>
-              <a:t>3/10/2026</a:t>
+              <a:t>3/13/2026</a:t>
             </a:fld>
             <a:endParaRPr lang="en-US"/>
           </a:p>
@@ -1070,7 +1600,7 @@
           <a:p>
             <a:fld id="{5BCAD085-E8A6-8845-BD4E-CB4CCA059FC4}" type="datetimeFigureOut">
               <a:rPr lang="en-US" smtClean="0"/>
-              <a:t>3/10/2026</a:t>
+              <a:t>3/13/2026</a:t>
             </a:fld>
             <a:endParaRPr lang="en-US"/>
           </a:p>
@@ -1355,7 +1885,7 @@
           <a:p>
             <a:fld id="{5BCAD085-E8A6-8845-BD4E-CB4CCA059FC4}" type="datetimeFigureOut">
               <a:rPr lang="en-US" smtClean="0"/>
-              <a:t>3/10/2026</a:t>
+              <a:t>3/13/2026</a:t>
             </a:fld>
             <a:endParaRPr lang="en-US"/>
           </a:p>
@@ -1774,7 +2304,7 @@
           <a:p>
             <a:fld id="{5BCAD085-E8A6-8845-BD4E-CB4CCA059FC4}" type="datetimeFigureOut">
               <a:rPr lang="en-US" smtClean="0"/>
-              <a:t>3/10/2026</a:t>
+              <a:t>3/13/2026</a:t>
             </a:fld>
             <a:endParaRPr lang="en-US"/>
           </a:p>
@@ -1891,7 +2421,7 @@
           <a:p>
             <a:fld id="{5BCAD085-E8A6-8845-BD4E-CB4CCA059FC4}" type="datetimeFigureOut">
               <a:rPr lang="en-US" smtClean="0"/>
-              <a:t>3/10/2026</a:t>
+              <a:t>3/13/2026</a:t>
             </a:fld>
             <a:endParaRPr lang="en-US"/>
           </a:p>
@@ -1986,7 +2516,7 @@
           <a:p>
             <a:fld id="{5BCAD085-E8A6-8845-BD4E-CB4CCA059FC4}" type="datetimeFigureOut">
               <a:rPr lang="en-US" smtClean="0"/>
-              <a:t>3/10/2026</a:t>
+              <a:t>3/13/2026</a:t>
             </a:fld>
             <a:endParaRPr lang="en-US"/>
           </a:p>
@@ -2261,7 +2791,7 @@
           <a:p>
             <a:fld id="{5BCAD085-E8A6-8845-BD4E-CB4CCA059FC4}" type="datetimeFigureOut">
               <a:rPr lang="en-US" smtClean="0"/>
-              <a:t>3/10/2026</a:t>
+              <a:t>3/13/2026</a:t>
             </a:fld>
             <a:endParaRPr lang="en-US"/>
           </a:p>
@@ -2513,7 +3043,7 @@
           <a:p>
             <a:fld id="{5BCAD085-E8A6-8845-BD4E-CB4CCA059FC4}" type="datetimeFigureOut">
               <a:rPr lang="en-US" smtClean="0"/>
-              <a:t>3/10/2026</a:t>
+              <a:t>3/13/2026</a:t>
             </a:fld>
             <a:endParaRPr lang="en-US"/>
           </a:p>
@@ -2724,7 +3254,7 @@
           <a:p>
             <a:fld id="{5BCAD085-E8A6-8845-BD4E-CB4CCA059FC4}" type="datetimeFigureOut">
               <a:rPr lang="en-US" smtClean="0"/>
-              <a:t>3/10/2026</a:t>
+              <a:t>3/13/2026</a:t>
             </a:fld>
             <a:endParaRPr lang="en-US"/>
           </a:p>
@@ -3111,7 +3641,9 @@
         </p:nvSpPr>
         <p:spPr/>
         <p:txBody>
-          <a:bodyPr/>
+          <a:bodyPr>
+            <a:normAutofit fontScale="90000"/>
+          </a:bodyPr>
           <a:lstStyle/>
           <a:p>
             <a:r>
@@ -3136,21 +3668,25 @@
           <a:lstStyle/>
           <a:p>
             <a:r>
+              <a:rPr dirty="0"/>
               <a:t>DSPRO1 Project</a:t>
             </a:r>
           </a:p>
           <a:p>
             <a:r>
+              <a:rPr dirty="0"/>
               <a:t>Team: Elias Martinelli, Timo Schlumpf</a:t>
             </a:r>
           </a:p>
           <a:p>
             <a:r>
+              <a:rPr dirty="0"/>
               <a:t>Supervisor: Elena Nazarenko</a:t>
             </a:r>
           </a:p>
           <a:p>
             <a:r>
+              <a:rPr dirty="0"/>
               <a:t>HSLU Informatik</a:t>
             </a:r>
           </a:p>
@@ -3197,6 +3733,242 @@
           <a:lstStyle/>
           <a:p>
             <a:r>
+              <a:t>Models</a:t>
+            </a:r>
+          </a:p>
+        </p:txBody>
+      </p:sp>
+      <p:sp>
+        <p:nvSpPr>
+          <p:cNvPr id="3" name="Content Placeholder 2"/>
+          <p:cNvSpPr>
+            <a:spLocks noGrp="1"/>
+          </p:cNvSpPr>
+          <p:nvPr>
+            <p:ph idx="1"/>
+          </p:nvPr>
+        </p:nvSpPr>
+        <p:spPr/>
+        <p:txBody>
+          <a:bodyPr/>
+          <a:lstStyle/>
+          <a:p>
+            <a:r>
+              <a:t>Baseline model (mean rent)</a:t>
+            </a:r>
+          </a:p>
+          <a:p>
+            <a:r>
+              <a:t>Linear Regression</a:t>
+            </a:r>
+          </a:p>
+          <a:p>
+            <a:r>
+              <a:t>Random Forest Regressor</a:t>
+            </a:r>
+          </a:p>
+        </p:txBody>
+      </p:sp>
+    </p:spTree>
+  </p:cSld>
+  <p:clrMapOvr>
+    <a:masterClrMapping/>
+  </p:clrMapOvr>
+</p:sld>
+</file>
+
+<file path=ppt/slides/slide11.xml><?xml version="1.0" encoding="utf-8"?>
+<p:sld xmlns:a="http://schemas.openxmlformats.org/drawingml/2006/main" xmlns:r="http://schemas.openxmlformats.org/officeDocument/2006/relationships" xmlns:p="http://schemas.openxmlformats.org/presentationml/2006/main">
+  <p:cSld>
+    <p:spTree>
+      <p:nvGrpSpPr>
+        <p:cNvPr id="1" name=""/>
+        <p:cNvGrpSpPr/>
+        <p:nvPr/>
+      </p:nvGrpSpPr>
+      <p:grpSpPr>
+        <a:xfrm>
+          <a:off x="0" y="0"/>
+          <a:ext cx="0" cy="0"/>
+          <a:chOff x="0" y="0"/>
+          <a:chExt cx="0" cy="0"/>
+        </a:xfrm>
+      </p:grpSpPr>
+      <p:sp>
+        <p:nvSpPr>
+          <p:cNvPr id="2" name="Title 1"/>
+          <p:cNvSpPr>
+            <a:spLocks noGrp="1"/>
+          </p:cNvSpPr>
+          <p:nvPr>
+            <p:ph type="title"/>
+          </p:nvPr>
+        </p:nvSpPr>
+        <p:spPr/>
+        <p:txBody>
+          <a:bodyPr/>
+          <a:lstStyle/>
+          <a:p>
+            <a:r>
+              <a:t>Evaluation Metrics</a:t>
+            </a:r>
+          </a:p>
+        </p:txBody>
+      </p:sp>
+      <p:sp>
+        <p:nvSpPr>
+          <p:cNvPr id="3" name="Content Placeholder 2"/>
+          <p:cNvSpPr>
+            <a:spLocks noGrp="1"/>
+          </p:cNvSpPr>
+          <p:nvPr>
+            <p:ph idx="1"/>
+          </p:nvPr>
+        </p:nvSpPr>
+        <p:spPr/>
+        <p:txBody>
+          <a:bodyPr/>
+          <a:lstStyle/>
+          <a:p>
+            <a:r>
+              <a:t>MAE (Mean Absolute Error)</a:t>
+            </a:r>
+          </a:p>
+          <a:p>
+            <a:r>
+              <a:t>RMSE (Root Mean Squared Error)</a:t>
+            </a:r>
+          </a:p>
+          <a:p>
+            <a:r>
+              <a:t>R² (Coefficient of Determination)</a:t>
+            </a:r>
+          </a:p>
+          <a:p>
+            <a:r>
+              <a:t>Cross-validation used for comparison</a:t>
+            </a:r>
+          </a:p>
+        </p:txBody>
+      </p:sp>
+    </p:spTree>
+  </p:cSld>
+  <p:clrMapOvr>
+    <a:masterClrMapping/>
+  </p:clrMapOvr>
+</p:sld>
+</file>
+
+<file path=ppt/slides/slide12.xml><?xml version="1.0" encoding="utf-8"?>
+<p:sld xmlns:a="http://schemas.openxmlformats.org/drawingml/2006/main" xmlns:r="http://schemas.openxmlformats.org/officeDocument/2006/relationships" xmlns:p="http://schemas.openxmlformats.org/presentationml/2006/main">
+  <p:cSld>
+    <p:spTree>
+      <p:nvGrpSpPr>
+        <p:cNvPr id="1" name=""/>
+        <p:cNvGrpSpPr/>
+        <p:nvPr/>
+      </p:nvGrpSpPr>
+      <p:grpSpPr>
+        <a:xfrm>
+          <a:off x="0" y="0"/>
+          <a:ext cx="0" cy="0"/>
+          <a:chOff x="0" y="0"/>
+          <a:chExt cx="0" cy="0"/>
+        </a:xfrm>
+      </p:grpSpPr>
+      <p:sp>
+        <p:nvSpPr>
+          <p:cNvPr id="2" name="Title 1"/>
+          <p:cNvSpPr>
+            <a:spLocks noGrp="1"/>
+          </p:cNvSpPr>
+          <p:nvPr>
+            <p:ph type="title"/>
+          </p:nvPr>
+        </p:nvSpPr>
+        <p:spPr/>
+        <p:txBody>
+          <a:bodyPr/>
+          <a:lstStyle/>
+          <a:p>
+            <a:r>
+              <a:t>Results (Planned)</a:t>
+            </a:r>
+          </a:p>
+        </p:txBody>
+      </p:sp>
+      <p:sp>
+        <p:nvSpPr>
+          <p:cNvPr id="3" name="Content Placeholder 2"/>
+          <p:cNvSpPr>
+            <a:spLocks noGrp="1"/>
+          </p:cNvSpPr>
+          <p:nvPr>
+            <p:ph idx="1"/>
+          </p:nvPr>
+        </p:nvSpPr>
+        <p:spPr/>
+        <p:txBody>
+          <a:bodyPr/>
+          <a:lstStyle/>
+          <a:p>
+            <a:r>
+              <a:t>Compare predictive performance of models</a:t>
+            </a:r>
+          </a:p>
+          <a:p>
+            <a:r>
+              <a:t>Analyze feature importance</a:t>
+            </a:r>
+          </a:p>
+          <a:p>
+            <a:r>
+              <a:t>Evaluate prediction errors</a:t>
+            </a:r>
+          </a:p>
+        </p:txBody>
+      </p:sp>
+    </p:spTree>
+  </p:cSld>
+  <p:clrMapOvr>
+    <a:masterClrMapping/>
+  </p:clrMapOvr>
+</p:sld>
+</file>
+
+<file path=ppt/slides/slide13.xml><?xml version="1.0" encoding="utf-8"?>
+<p:sld xmlns:a="http://schemas.openxmlformats.org/drawingml/2006/main" xmlns:r="http://schemas.openxmlformats.org/officeDocument/2006/relationships" xmlns:p="http://schemas.openxmlformats.org/presentationml/2006/main">
+  <p:cSld>
+    <p:spTree>
+      <p:nvGrpSpPr>
+        <p:cNvPr id="1" name=""/>
+        <p:cNvGrpSpPr/>
+        <p:nvPr/>
+      </p:nvGrpSpPr>
+      <p:grpSpPr>
+        <a:xfrm>
+          <a:off x="0" y="0"/>
+          <a:ext cx="0" cy="0"/>
+          <a:chOff x="0" y="0"/>
+          <a:chExt cx="0" cy="0"/>
+        </a:xfrm>
+      </p:grpSpPr>
+      <p:sp>
+        <p:nvSpPr>
+          <p:cNvPr id="2" name="Title 1"/>
+          <p:cNvSpPr>
+            <a:spLocks noGrp="1"/>
+          </p:cNvSpPr>
+          <p:nvPr>
+            <p:ph type="title"/>
+          </p:nvPr>
+        </p:nvSpPr>
+        <p:spPr/>
+        <p:txBody>
+          <a:bodyPr/>
+          <a:lstStyle/>
+          <a:p>
+            <a:r>
               <a:t>Conclusion (Planned)</a:t>
             </a:r>
           </a:p>
@@ -3295,16 +4067,19 @@
           <a:lstStyle/>
           <a:p>
             <a:r>
+              <a:rPr dirty="0"/>
               <a:t>Swiss rental prices vary strongly by location.</a:t>
             </a:r>
           </a:p>
           <a:p>
             <a:r>
+              <a:rPr dirty="0"/>
               <a:t>Prospective tenants often struggle to judge if a rent is fair.</a:t>
             </a:r>
           </a:p>
           <a:p>
             <a:r>
+              <a:rPr dirty="0"/>
               <a:t>Goal: Predict monthly rent using machine learning.</a:t>
             </a:r>
           </a:p>
@@ -3337,7 +4112,13 @@
       </p:grpSpPr>
       <p:sp>
         <p:nvSpPr>
-          <p:cNvPr id="2" name="Title 1"/>
+          <p:cNvPr id="2" name="Titel 1">
+            <a:extLst>
+              <a:ext uri="{FF2B5EF4-FFF2-40B4-BE49-F238E27FC236}">
+                <a16:creationId xmlns:a16="http://schemas.microsoft.com/office/drawing/2014/main" id="{E79B9004-0E7D-14C7-0C57-593C2833F6A8}"/>
+              </a:ext>
+            </a:extLst>
+          </p:cNvPr>
           <p:cNvSpPr>
             <a:spLocks noGrp="1"/>
           </p:cNvSpPr>
@@ -3351,14 +4132,21 @@
           <a:lstStyle/>
           <a:p>
             <a:r>
-              <a:t>Data Source</a:t>
-            </a:r>
-          </a:p>
-        </p:txBody>
-      </p:sp>
-      <p:sp>
-        <p:nvSpPr>
-          <p:cNvPr id="3" name="Content Placeholder 2"/>
+              <a:rPr lang="de-CH" dirty="0"/>
+              <a:t>Project Progress</a:t>
+            </a:r>
+          </a:p>
+        </p:txBody>
+      </p:sp>
+      <p:sp>
+        <p:nvSpPr>
+          <p:cNvPr id="3" name="Inhaltsplatzhalter 2">
+            <a:extLst>
+              <a:ext uri="{FF2B5EF4-FFF2-40B4-BE49-F238E27FC236}">
+                <a16:creationId xmlns:a16="http://schemas.microsoft.com/office/drawing/2014/main" id="{82F896CA-FB77-3A54-E9F7-B1BA5D701DDD}"/>
+              </a:ext>
+            </a:extLst>
+          </p:cNvPr>
           <p:cNvSpPr>
             <a:spLocks noGrp="1"/>
           </p:cNvSpPr>
@@ -3372,22 +4160,55 @@
           <a:lstStyle/>
           <a:p>
             <a:r>
-              <a:t>Primary dataset: Swiss apartment listings scraped from Comparis.</a:t>
-            </a:r>
-          </a:p>
-          <a:p>
-            <a:r>
-              <a:t>Several thousand listings expected.</a:t>
-            </a:r>
-          </a:p>
-          <a:p>
-            <a:r>
-              <a:t>Target variable: Monthly rent in CHF.</a:t>
-            </a:r>
-          </a:p>
-        </p:txBody>
-      </p:sp>
+              <a:rPr lang="de-CH" dirty="0" err="1"/>
+              <a:t>Github</a:t>
+            </a:r>
+            <a:r>
+              <a:rPr lang="de-CH" dirty="0"/>
+              <a:t> Projects =&gt; KANBAN  Tool</a:t>
+            </a:r>
+          </a:p>
+          <a:p>
+            <a:endParaRPr lang="de-CH" dirty="0"/>
+          </a:p>
+        </p:txBody>
+      </p:sp>
+      <p:pic>
+        <p:nvPicPr>
+          <p:cNvPr id="6" name="Grafik 5" descr="Ein Bild, das Screenshot, Software, Multimedia-Software, Text enthält.&#10;&#10;KI-generierte Inhalte können fehlerhaft sein.">
+            <a:extLst>
+              <a:ext uri="{FF2B5EF4-FFF2-40B4-BE49-F238E27FC236}">
+                <a16:creationId xmlns:a16="http://schemas.microsoft.com/office/drawing/2014/main" id="{4242030E-257C-817F-B8BD-DE74EE9207F0}"/>
+              </a:ext>
+            </a:extLst>
+          </p:cNvPr>
+          <p:cNvPicPr>
+            <a:picLocks noChangeAspect="1"/>
+          </p:cNvPicPr>
+          <p:nvPr/>
+        </p:nvPicPr>
+        <p:blipFill>
+          <a:blip r:embed="rId3"/>
+          <a:stretch>
+            <a:fillRect/>
+          </a:stretch>
+        </p:blipFill>
+        <p:spPr>
+          <a:xfrm>
+            <a:off x="457200" y="2200208"/>
+            <a:ext cx="8229600" cy="3610857"/>
+          </a:xfrm>
+          <a:prstGeom prst="rect">
+            <a:avLst/>
+          </a:prstGeom>
+        </p:spPr>
+      </p:pic>
     </p:spTree>
+    <p:extLst>
+      <p:ext uri="{BB962C8B-B14F-4D97-AF65-F5344CB8AC3E}">
+        <p14:creationId xmlns:p14="http://schemas.microsoft.com/office/powerpoint/2010/main" val="3444210151"/>
+      </p:ext>
+    </p:extLst>
   </p:cSld>
   <p:clrMapOvr>
     <a:masterClrMapping/>
@@ -3400,7 +4221,13 @@
   <p:cSld>
     <p:spTree>
       <p:nvGrpSpPr>
-        <p:cNvPr id="1" name=""/>
+        <p:cNvPr id="1" name="">
+          <a:extLst>
+            <a:ext uri="{FF2B5EF4-FFF2-40B4-BE49-F238E27FC236}">
+              <a16:creationId xmlns:a16="http://schemas.microsoft.com/office/drawing/2014/main" id="{2F0F8BED-6ACD-6F20-68F0-9CEB12A3A89F}"/>
+            </a:ext>
+          </a:extLst>
+        </p:cNvPr>
         <p:cNvGrpSpPr/>
         <p:nvPr/>
       </p:nvGrpSpPr>
@@ -3414,7 +4241,13 @@
       </p:grpSpPr>
       <p:sp>
         <p:nvSpPr>
-          <p:cNvPr id="2" name="Title 1"/>
+          <p:cNvPr id="2" name="Titel 1">
+            <a:extLst>
+              <a:ext uri="{FF2B5EF4-FFF2-40B4-BE49-F238E27FC236}">
+                <a16:creationId xmlns:a16="http://schemas.microsoft.com/office/drawing/2014/main" id="{7D5D4EC9-CB41-A05D-1F9A-81201000CAA0}"/>
+              </a:ext>
+            </a:extLst>
+          </p:cNvPr>
           <p:cNvSpPr>
             <a:spLocks noGrp="1"/>
           </p:cNvSpPr>
@@ -3428,53 +4261,47 @@
           <a:lstStyle/>
           <a:p>
             <a:r>
-              <a:t>Features</a:t>
-            </a:r>
-          </a:p>
-        </p:txBody>
-      </p:sp>
-      <p:sp>
-        <p:nvSpPr>
-          <p:cNvPr id="3" name="Content Placeholder 2"/>
-          <p:cNvSpPr>
-            <a:spLocks noGrp="1"/>
-          </p:cNvSpPr>
+              <a:rPr lang="de-CH" dirty="0"/>
+              <a:t>Milestones</a:t>
+            </a:r>
+          </a:p>
+        </p:txBody>
+      </p:sp>
+      <p:pic>
+        <p:nvPicPr>
+          <p:cNvPr id="6" name="Inhaltsplatzhalter 8" descr="Ein Bild, das Text, Screenshot, Software, Multimedia-Software enthält.&#10;&#10;KI-generierte Inhalte können fehlerhaft sein.">
+            <a:extLst>
+              <a:ext uri="{FF2B5EF4-FFF2-40B4-BE49-F238E27FC236}">
+                <a16:creationId xmlns:a16="http://schemas.microsoft.com/office/drawing/2014/main" id="{0012AD2F-D783-0FFD-366B-CB9E134F9BE8}"/>
+              </a:ext>
+            </a:extLst>
+          </p:cNvPr>
+          <p:cNvPicPr>
+            <a:picLocks noGrp="1" noChangeAspect="1"/>
+          </p:cNvPicPr>
           <p:nvPr>
             <p:ph idx="1"/>
           </p:nvPr>
-        </p:nvSpPr>
-        <p:spPr/>
-        <p:txBody>
-          <a:bodyPr/>
-          <a:lstStyle/>
-          <a:p>
-            <a:r>
-              <a:t>Living area (sqm)</a:t>
-            </a:r>
-          </a:p>
-          <a:p>
-            <a:r>
-              <a:t>Number of rooms</a:t>
-            </a:r>
-          </a:p>
-          <a:p>
-            <a:r>
-              <a:t>Floor / year built</a:t>
-            </a:r>
-          </a:p>
-          <a:p>
-            <a:r>
-              <a:t>Canton, city, ZIP code</a:t>
-            </a:r>
-          </a:p>
-          <a:p>
-            <a:r>
-              <a:t>Apartment characteristics (balcony, parking, furnished)</a:t>
-            </a:r>
-          </a:p>
-        </p:txBody>
-      </p:sp>
+        </p:nvPicPr>
+        <p:blipFill>
+          <a:blip r:embed="rId2"/>
+          <a:stretch>
+            <a:fillRect/>
+          </a:stretch>
+        </p:blipFill>
+        <p:spPr>
+          <a:xfrm>
+            <a:off x="1566672" y="1378794"/>
+            <a:ext cx="6010656" cy="5325231"/>
+          </a:xfrm>
+        </p:spPr>
+      </p:pic>
     </p:spTree>
+    <p:extLst>
+      <p:ext uri="{BB962C8B-B14F-4D97-AF65-F5344CB8AC3E}">
+        <p14:creationId xmlns:p14="http://schemas.microsoft.com/office/powerpoint/2010/main" val="1416315710"/>
+      </p:ext>
+    </p:extLst>
   </p:cSld>
   <p:clrMapOvr>
     <a:masterClrMapping/>
@@ -3501,7 +4328,13 @@
       </p:grpSpPr>
       <p:sp>
         <p:nvSpPr>
-          <p:cNvPr id="2" name="Title 1"/>
+          <p:cNvPr id="2" name="Titel 1">
+            <a:extLst>
+              <a:ext uri="{FF2B5EF4-FFF2-40B4-BE49-F238E27FC236}">
+                <a16:creationId xmlns:a16="http://schemas.microsoft.com/office/drawing/2014/main" id="{B4880AB5-AF98-E7BA-E1C1-36565F0BEBBD}"/>
+              </a:ext>
+            </a:extLst>
+          </p:cNvPr>
           <p:cNvSpPr>
             <a:spLocks noGrp="1"/>
           </p:cNvSpPr>
@@ -3515,53 +4348,50 @@
           <a:lstStyle/>
           <a:p>
             <a:r>
-              <a:t>Data Processing</a:t>
-            </a:r>
-          </a:p>
-        </p:txBody>
-      </p:sp>
-      <p:sp>
-        <p:nvSpPr>
-          <p:cNvPr id="3" name="Content Placeholder 2"/>
-          <p:cNvSpPr>
-            <a:spLocks noGrp="1"/>
-          </p:cNvSpPr>
+              <a:rPr lang="de-CH" dirty="0"/>
+              <a:t>Roadmap</a:t>
+            </a:r>
+          </a:p>
+        </p:txBody>
+      </p:sp>
+      <p:pic>
+        <p:nvPicPr>
+          <p:cNvPr id="5" name="Inhaltsplatzhalter 4" descr="Ein Bild, das Screenshot, Software, Multimedia-Software, Text enthält.&#10;&#10;KI-generierte Inhalte können fehlerhaft sein.">
+            <a:extLst>
+              <a:ext uri="{FF2B5EF4-FFF2-40B4-BE49-F238E27FC236}">
+                <a16:creationId xmlns:a16="http://schemas.microsoft.com/office/drawing/2014/main" id="{05CEB87D-E596-8ED7-8E54-5BB26796C8E2}"/>
+              </a:ext>
+            </a:extLst>
+          </p:cNvPr>
+          <p:cNvPicPr>
+            <a:picLocks noGrp="1" noChangeAspect="1"/>
+          </p:cNvPicPr>
           <p:nvPr>
             <p:ph idx="1"/>
           </p:nvPr>
-        </p:nvSpPr>
-        <p:spPr/>
-        <p:txBody>
-          <a:bodyPr/>
-          <a:lstStyle/>
-          <a:p>
-            <a:r>
-              <a:t>Remove duplicates</a:t>
-            </a:r>
-          </a:p>
-          <a:p>
-            <a:r>
-              <a:t>Handle missing values</a:t>
-            </a:r>
-          </a:p>
-          <a:p>
-            <a:r>
-              <a:t>Clean categorical labels</a:t>
-            </a:r>
-          </a:p>
-          <a:p>
-            <a:r>
-              <a:t>Detect outliers</a:t>
-            </a:r>
-          </a:p>
-          <a:p>
-            <a:r>
-              <a:t>Feature scaling for linear models</a:t>
-            </a:r>
-          </a:p>
-        </p:txBody>
-      </p:sp>
+        </p:nvPicPr>
+        <p:blipFill>
+          <a:blip r:embed="rId2"/>
+          <a:stretch>
+            <a:fillRect/>
+          </a:stretch>
+        </p:blipFill>
+        <p:spPr>
+          <a:xfrm>
+            <a:off x="457200" y="2161328"/>
+            <a:ext cx="8229600" cy="3403707"/>
+          </a:xfrm>
+          <a:prstGeom prst="rect">
+            <a:avLst/>
+          </a:prstGeom>
+        </p:spPr>
+      </p:pic>
     </p:spTree>
+    <p:extLst>
+      <p:ext uri="{BB962C8B-B14F-4D97-AF65-F5344CB8AC3E}">
+        <p14:creationId xmlns:p14="http://schemas.microsoft.com/office/powerpoint/2010/main" val="2171469431"/>
+      </p:ext>
+    </p:extLst>
   </p:cSld>
   <p:clrMapOvr>
     <a:masterClrMapping/>
@@ -3602,7 +4432,7 @@
           <a:lstStyle/>
           <a:p>
             <a:r>
-              <a:t>Feature Engineering</a:t>
+              <a:t>Data Source</a:t>
             </a:r>
           </a:p>
         </p:txBody>
@@ -3623,22 +4453,28 @@
           <a:lstStyle/>
           <a:p>
             <a:r>
-              <a:t>Location variables</a:t>
-            </a:r>
-          </a:p>
-          <a:p>
-            <a:r>
-              <a:t>Derived features (rent per sqm)</a:t>
-            </a:r>
-          </a:p>
-          <a:p>
-            <a:r>
-              <a:t>Tax index by municipality</a:t>
-            </a:r>
-          </a:p>
-          <a:p>
-            <a:r>
-              <a:t>Distance to public transport</a:t>
+              <a:rPr dirty="0"/>
+              <a:t>Primary dataset: Swiss apartment listings scraped from </a:t>
+            </a:r>
+            <a:r>
+              <a:rPr dirty="0" err="1"/>
+              <a:t>Comparis</a:t>
+            </a:r>
+            <a:r>
+              <a:rPr dirty="0"/>
+              <a:t>.</a:t>
+            </a:r>
+          </a:p>
+          <a:p>
+            <a:r>
+              <a:rPr dirty="0"/>
+              <a:t>Several thousand listings expected.</a:t>
+            </a:r>
+          </a:p>
+          <a:p>
+            <a:r>
+              <a:rPr dirty="0"/>
+              <a:t>Target variable: Monthly rent in CHF.</a:t>
             </a:r>
           </a:p>
         </p:txBody>
@@ -3684,7 +4520,7 @@
           <a:lstStyle/>
           <a:p>
             <a:r>
-              <a:t>Models</a:t>
+              <a:t>Features</a:t>
             </a:r>
           </a:p>
         </p:txBody>
@@ -3705,18 +4541,45 @@
           <a:lstStyle/>
           <a:p>
             <a:r>
-              <a:t>Baseline model (mean rent)</a:t>
-            </a:r>
-          </a:p>
-          <a:p>
-            <a:r>
-              <a:t>Linear Regression</a:t>
-            </a:r>
-          </a:p>
-          <a:p>
-            <a:r>
-              <a:t>Random Forest Regressor</a:t>
-            </a:r>
+              <a:rPr dirty="0"/>
+              <a:t>Living area (sqm)</a:t>
+            </a:r>
+          </a:p>
+          <a:p>
+            <a:r>
+              <a:rPr dirty="0"/>
+              <a:t>Number of rooms</a:t>
+            </a:r>
+          </a:p>
+          <a:p>
+            <a:r>
+              <a:rPr dirty="0"/>
+              <a:t>Floor / year built</a:t>
+            </a:r>
+          </a:p>
+          <a:p>
+            <a:r>
+              <a:rPr dirty="0"/>
+              <a:t>Canton, city, ZIP code</a:t>
+            </a:r>
+          </a:p>
+          <a:p>
+            <a:r>
+              <a:rPr dirty="0"/>
+              <a:t>Apartment characteristics (balcony, parking, furnished)</a:t>
+            </a:r>
+            <a:endParaRPr lang="de-CH" dirty="0"/>
+          </a:p>
+          <a:p>
+            <a:r>
+              <a:rPr lang="de-CH" dirty="0"/>
+              <a:t>Monthly </a:t>
+            </a:r>
+            <a:r>
+              <a:rPr lang="de-CH" dirty="0" err="1"/>
+              <a:t>rent</a:t>
+            </a:r>
+            <a:endParaRPr dirty="0"/>
           </a:p>
         </p:txBody>
       </p:sp>
@@ -3761,7 +4624,7 @@
           <a:lstStyle/>
           <a:p>
             <a:r>
-              <a:t>Evaluation Metrics</a:t>
+              <a:t>Data Processing</a:t>
             </a:r>
           </a:p>
         </p:txBody>
@@ -3782,22 +4645,32 @@
           <a:lstStyle/>
           <a:p>
             <a:r>
-              <a:t>MAE (Mean Absolute Error)</a:t>
-            </a:r>
-          </a:p>
-          <a:p>
-            <a:r>
-              <a:t>RMSE (Root Mean Squared Error)</a:t>
-            </a:r>
-          </a:p>
-          <a:p>
-            <a:r>
-              <a:t>R² (Coefficient of Determination)</a:t>
-            </a:r>
-          </a:p>
-          <a:p>
-            <a:r>
-              <a:t>Cross-validation used for comparison</a:t>
+              <a:rPr dirty="0"/>
+              <a:t>Remove duplicates</a:t>
+            </a:r>
+          </a:p>
+          <a:p>
+            <a:r>
+              <a:rPr dirty="0"/>
+              <a:t>Handle missing values</a:t>
+            </a:r>
+          </a:p>
+          <a:p>
+            <a:r>
+              <a:rPr dirty="0"/>
+              <a:t>Clean categorical labels</a:t>
+            </a:r>
+          </a:p>
+          <a:p>
+            <a:r>
+              <a:rPr dirty="0"/>
+              <a:t>Detect outliers</a:t>
+            </a:r>
+          </a:p>
+          <a:p>
+            <a:r>
+              <a:rPr dirty="0"/>
+              <a:t>Feature scaling for linear models</a:t>
             </a:r>
           </a:p>
         </p:txBody>
@@ -3843,7 +4716,7 @@
           <a:lstStyle/>
           <a:p>
             <a:r>
-              <a:t>Results (Planned)</a:t>
+              <a:t>Feature Engineering</a:t>
             </a:r>
           </a:p>
         </p:txBody>
@@ -3864,17 +4737,22 @@
           <a:lstStyle/>
           <a:p>
             <a:r>
-              <a:t>Compare predictive performance of models</a:t>
-            </a:r>
-          </a:p>
-          <a:p>
-            <a:r>
-              <a:t>Analyze feature importance</a:t>
-            </a:r>
-          </a:p>
-          <a:p>
-            <a:r>
-              <a:t>Evaluate prediction errors</a:t>
+              <a:t>Location variables</a:t>
+            </a:r>
+          </a:p>
+          <a:p>
+            <a:r>
+              <a:t>Derived features (rent per sqm)</a:t>
+            </a:r>
+          </a:p>
+          <a:p>
+            <a:r>
+              <a:t>Tax index by municipality</a:t>
+            </a:r>
+          </a:p>
+          <a:p>
+            <a:r>
+              <a:t>Distance to public transport</a:t>
             </a:r>
           </a:p>
         </p:txBody>
@@ -4205,4 +5083,319 @@
   </a:objectDefaults>
   <a:extraClrSchemeLst/>
 </a:theme>
+</file>
+
+<file path=ppt/theme/theme2.xml><?xml version="1.0" encoding="utf-8"?>
+<a:theme xmlns:a="http://schemas.openxmlformats.org/drawingml/2006/main" name="Office">
+  <a:themeElements>
+    <a:clrScheme name="Office">
+      <a:dk1>
+        <a:sysClr val="windowText" lastClr="000000"/>
+      </a:dk1>
+      <a:lt1>
+        <a:sysClr val="window" lastClr="FFFFFF"/>
+      </a:lt1>
+      <a:dk2>
+        <a:srgbClr val="0E2841"/>
+      </a:dk2>
+      <a:lt2>
+        <a:srgbClr val="E8E8E8"/>
+      </a:lt2>
+      <a:accent1>
+        <a:srgbClr val="156082"/>
+      </a:accent1>
+      <a:accent2>
+        <a:srgbClr val="E97132"/>
+      </a:accent2>
+      <a:accent3>
+        <a:srgbClr val="196B24"/>
+      </a:accent3>
+      <a:accent4>
+        <a:srgbClr val="0F9ED5"/>
+      </a:accent4>
+      <a:accent5>
+        <a:srgbClr val="A02B93"/>
+      </a:accent5>
+      <a:accent6>
+        <a:srgbClr val="4EA72E"/>
+      </a:accent6>
+      <a:hlink>
+        <a:srgbClr val="467886"/>
+      </a:hlink>
+      <a:folHlink>
+        <a:srgbClr val="96607D"/>
+      </a:folHlink>
+    </a:clrScheme>
+    <a:fontScheme name="Office">
+      <a:majorFont>
+        <a:latin typeface="Aptos Display" panose="02110004020202020204"/>
+        <a:ea typeface=""/>
+        <a:cs typeface=""/>
+        <a:font script="Jpan" typeface="游ゴシック Light"/>
+        <a:font script="Hang" typeface="맑은 고딕"/>
+        <a:font script="Hans" typeface="等线 Light"/>
+        <a:font script="Hant" typeface="新細明體"/>
+        <a:font script="Arab" typeface="Times New Roman"/>
+        <a:font script="Hebr" typeface="Times New Roman"/>
+        <a:font script="Thai" typeface="Angsana New"/>
+        <a:font script="Ethi" typeface="Nyala"/>
+        <a:font script="Beng" typeface="Vrinda"/>
+        <a:font script="Gujr" typeface="Shruti"/>
+        <a:font script="Khmr" typeface="MoolBoran"/>
+        <a:font script="Knda" typeface="Tunga"/>
+        <a:font script="Guru" typeface="Raavi"/>
+        <a:font script="Cans" typeface="Euphemia"/>
+        <a:font script="Cher" typeface="Plantagenet Cherokee"/>
+        <a:font script="Yiii" typeface="Microsoft Yi Baiti"/>
+        <a:font script="Tibt" typeface="Microsoft Himalaya"/>
+        <a:font script="Thaa" typeface="MV Boli"/>
+        <a:font script="Deva" typeface="Mangal"/>
+        <a:font script="Telu" typeface="Gautami"/>
+        <a:font script="Taml" typeface="Latha"/>
+        <a:font script="Syrc" typeface="Estrangelo Edessa"/>
+        <a:font script="Orya" typeface="Kalinga"/>
+        <a:font script="Mlym" typeface="Kartika"/>
+        <a:font script="Laoo" typeface="DokChampa"/>
+        <a:font script="Sinh" typeface="Iskoola Pota"/>
+        <a:font script="Mong" typeface="Mongolian Baiti"/>
+        <a:font script="Viet" typeface="Times New Roman"/>
+        <a:font script="Uigh" typeface="Microsoft Uighur"/>
+        <a:font script="Geor" typeface="Sylfaen"/>
+        <a:font script="Armn" typeface="Arial"/>
+        <a:font script="Bugi" typeface="Leelawadee UI"/>
+        <a:font script="Bopo" typeface="Microsoft JhengHei"/>
+        <a:font script="Java" typeface="Javanese Text"/>
+        <a:font script="Lisu" typeface="Segoe UI"/>
+        <a:font script="Mymr" typeface="Myanmar Text"/>
+        <a:font script="Nkoo" typeface="Ebrima"/>
+        <a:font script="Olck" typeface="Nirmala UI"/>
+        <a:font script="Osma" typeface="Ebrima"/>
+        <a:font script="Phag" typeface="Phagspa"/>
+        <a:font script="Syrn" typeface="Estrangelo Edessa"/>
+        <a:font script="Syrj" typeface="Estrangelo Edessa"/>
+        <a:font script="Syre" typeface="Estrangelo Edessa"/>
+        <a:font script="Sora" typeface="Nirmala UI"/>
+        <a:font script="Tale" typeface="Microsoft Tai Le"/>
+        <a:font script="Talu" typeface="Microsoft New Tai Lue"/>
+        <a:font script="Tfng" typeface="Ebrima"/>
+      </a:majorFont>
+      <a:minorFont>
+        <a:latin typeface="Aptos" panose="02110004020202020204"/>
+        <a:ea typeface=""/>
+        <a:cs typeface=""/>
+        <a:font script="Jpan" typeface="游ゴシック"/>
+        <a:font script="Hang" typeface="맑은 고딕"/>
+        <a:font script="Hans" typeface="等线"/>
+        <a:font script="Hant" typeface="新細明體"/>
+        <a:font script="Arab" typeface="Arial"/>
+        <a:font script="Hebr" typeface="Arial"/>
+        <a:font script="Thai" typeface="Cordia New"/>
+        <a:font script="Ethi" typeface="Nyala"/>
+        <a:font script="Beng" typeface="Vrinda"/>
+        <a:font script="Gujr" typeface="Shruti"/>
+        <a:font script="Khmr" typeface="DaunPenh"/>
+        <a:font script="Knda" typeface="Tunga"/>
+        <a:font script="Guru" typeface="Raavi"/>
+        <a:font script="Cans" typeface="Euphemia"/>
+        <a:font script="Cher" typeface="Plantagenet Cherokee"/>
+        <a:font script="Yiii" typeface="Microsoft Yi Baiti"/>
+        <a:font script="Tibt" typeface="Microsoft Himalaya"/>
+        <a:font script="Thaa" typeface="MV Boli"/>
+        <a:font script="Deva" typeface="Mangal"/>
+        <a:font script="Telu" typeface="Gautami"/>
+        <a:font script="Taml" typeface="Latha"/>
+        <a:font script="Syrc" typeface="Estrangelo Edessa"/>
+        <a:font script="Orya" typeface="Kalinga"/>
+        <a:font script="Mlym" typeface="Kartika"/>
+        <a:font script="Laoo" typeface="DokChampa"/>
+        <a:font script="Sinh" typeface="Iskoola Pota"/>
+        <a:font script="Mong" typeface="Mongolian Baiti"/>
+        <a:font script="Viet" typeface="Arial"/>
+        <a:font script="Uigh" typeface="Microsoft Uighur"/>
+        <a:font script="Geor" typeface="Sylfaen"/>
+        <a:font script="Armn" typeface="Arial"/>
+        <a:font script="Bugi" typeface="Leelawadee UI"/>
+        <a:font script="Bopo" typeface="Microsoft JhengHei"/>
+        <a:font script="Java" typeface="Javanese Text"/>
+        <a:font script="Lisu" typeface="Segoe UI"/>
+        <a:font script="Mymr" typeface="Myanmar Text"/>
+        <a:font script="Nkoo" typeface="Ebrima"/>
+        <a:font script="Olck" typeface="Nirmala UI"/>
+        <a:font script="Osma" typeface="Ebrima"/>
+        <a:font script="Phag" typeface="Phagspa"/>
+        <a:font script="Syrn" typeface="Estrangelo Edessa"/>
+        <a:font script="Syrj" typeface="Estrangelo Edessa"/>
+        <a:font script="Syre" typeface="Estrangelo Edessa"/>
+        <a:font script="Sora" typeface="Nirmala UI"/>
+        <a:font script="Tale" typeface="Microsoft Tai Le"/>
+        <a:font script="Talu" typeface="Microsoft New Tai Lue"/>
+        <a:font script="Tfng" typeface="Ebrima"/>
+      </a:minorFont>
+    </a:fontScheme>
+    <a:fmtScheme name="Office">
+      <a:fillStyleLst>
+        <a:solidFill>
+          <a:schemeClr val="phClr"/>
+        </a:solidFill>
+        <a:gradFill rotWithShape="1">
+          <a:gsLst>
+            <a:gs pos="0">
+              <a:schemeClr val="phClr">
+                <a:lumMod val="110000"/>
+                <a:satMod val="105000"/>
+                <a:tint val="67000"/>
+              </a:schemeClr>
+            </a:gs>
+            <a:gs pos="50000">
+              <a:schemeClr val="phClr">
+                <a:lumMod val="105000"/>
+                <a:satMod val="103000"/>
+                <a:tint val="73000"/>
+              </a:schemeClr>
+            </a:gs>
+            <a:gs pos="100000">
+              <a:schemeClr val="phClr">
+                <a:lumMod val="105000"/>
+                <a:satMod val="109000"/>
+                <a:tint val="81000"/>
+              </a:schemeClr>
+            </a:gs>
+          </a:gsLst>
+          <a:lin ang="5400000" scaled="0"/>
+        </a:gradFill>
+        <a:gradFill rotWithShape="1">
+          <a:gsLst>
+            <a:gs pos="0">
+              <a:schemeClr val="phClr">
+                <a:satMod val="103000"/>
+                <a:lumMod val="102000"/>
+                <a:tint val="94000"/>
+              </a:schemeClr>
+            </a:gs>
+            <a:gs pos="50000">
+              <a:schemeClr val="phClr">
+                <a:satMod val="110000"/>
+                <a:lumMod val="100000"/>
+                <a:shade val="100000"/>
+              </a:schemeClr>
+            </a:gs>
+            <a:gs pos="100000">
+              <a:schemeClr val="phClr">
+                <a:lumMod val="99000"/>
+                <a:satMod val="120000"/>
+                <a:shade val="78000"/>
+              </a:schemeClr>
+            </a:gs>
+          </a:gsLst>
+          <a:lin ang="5400000" scaled="0"/>
+        </a:gradFill>
+      </a:fillStyleLst>
+      <a:lnStyleLst>
+        <a:ln w="12700" cap="flat" cmpd="sng" algn="ctr">
+          <a:solidFill>
+            <a:schemeClr val="phClr"/>
+          </a:solidFill>
+          <a:prstDash val="solid"/>
+          <a:miter lim="800000"/>
+        </a:ln>
+        <a:ln w="19050" cap="flat" cmpd="sng" algn="ctr">
+          <a:solidFill>
+            <a:schemeClr val="phClr"/>
+          </a:solidFill>
+          <a:prstDash val="solid"/>
+          <a:miter lim="800000"/>
+        </a:ln>
+        <a:ln w="25400" cap="flat" cmpd="sng" algn="ctr">
+          <a:solidFill>
+            <a:schemeClr val="phClr"/>
+          </a:solidFill>
+          <a:prstDash val="solid"/>
+          <a:miter lim="800000"/>
+        </a:ln>
+      </a:lnStyleLst>
+      <a:effectStyleLst>
+        <a:effectStyle>
+          <a:effectLst/>
+        </a:effectStyle>
+        <a:effectStyle>
+          <a:effectLst/>
+        </a:effectStyle>
+        <a:effectStyle>
+          <a:effectLst>
+            <a:outerShdw blurRad="57150" dist="19050" dir="5400000" algn="ctr" rotWithShape="0">
+              <a:srgbClr val="000000">
+                <a:alpha val="63000"/>
+              </a:srgbClr>
+            </a:outerShdw>
+          </a:effectLst>
+        </a:effectStyle>
+      </a:effectStyleLst>
+      <a:bgFillStyleLst>
+        <a:solidFill>
+          <a:schemeClr val="phClr"/>
+        </a:solidFill>
+        <a:solidFill>
+          <a:schemeClr val="phClr">
+            <a:tint val="95000"/>
+            <a:satMod val="170000"/>
+          </a:schemeClr>
+        </a:solidFill>
+        <a:gradFill rotWithShape="1">
+          <a:gsLst>
+            <a:gs pos="0">
+              <a:schemeClr val="phClr">
+                <a:tint val="93000"/>
+                <a:satMod val="150000"/>
+                <a:shade val="98000"/>
+                <a:lumMod val="102000"/>
+              </a:schemeClr>
+            </a:gs>
+            <a:gs pos="50000">
+              <a:schemeClr val="phClr">
+                <a:tint val="98000"/>
+                <a:satMod val="130000"/>
+                <a:shade val="90000"/>
+                <a:lumMod val="103000"/>
+              </a:schemeClr>
+            </a:gs>
+            <a:gs pos="100000">
+              <a:schemeClr val="phClr">
+                <a:shade val="63000"/>
+                <a:satMod val="120000"/>
+              </a:schemeClr>
+            </a:gs>
+          </a:gsLst>
+          <a:lin ang="5400000" scaled="0"/>
+        </a:gradFill>
+      </a:bgFillStyleLst>
+    </a:fmtScheme>
+  </a:themeElements>
+  <a:objectDefaults>
+    <a:lnDef>
+      <a:spPr/>
+      <a:bodyPr/>
+      <a:lstStyle/>
+      <a:style>
+        <a:lnRef idx="2">
+          <a:schemeClr val="accent1"/>
+        </a:lnRef>
+        <a:fillRef idx="0">
+          <a:schemeClr val="accent1"/>
+        </a:fillRef>
+        <a:effectRef idx="1">
+          <a:schemeClr val="accent1"/>
+        </a:effectRef>
+        <a:fontRef idx="minor">
+          <a:schemeClr val="tx1"/>
+        </a:fontRef>
+      </a:style>
+    </a:lnDef>
+  </a:objectDefaults>
+  <a:extraClrSchemeLst/>
+  <a:extLst>
+    <a:ext uri="{05A4C25C-085E-4340-85A3-A5531E510DB2}">
+      <thm15:themeFamily xmlns:thm15="http://schemas.microsoft.com/office/thememl/2012/main" name="Office Theme" id="{2E142A2C-CD16-42D6-873A-C26D2A0506FA}" vid="{1BDDFF52-6CD6-40A5-AB3C-68EB2F1E4D0A}"/>
+    </a:ext>
+  </a:extLst>
+</a:theme>
 </file>